--- a/documents/slides/design_review_template.pptx
+++ b/documents/slides/design_review_template.pptx
@@ -4760,8 +4760,8 @@
         </p:blipFill>
         <p:spPr>
           <a:xfrm>
-            <a:off x="2558854" y="1097280"/>
-            <a:ext cx="7073986" cy="4937760"/>
+            <a:off x="2240474" y="978408"/>
+            <a:ext cx="7710747" cy="5056632"/>
           </a:xfrm>
           <a:prstGeom prst="rect">
             <a:avLst/>

--- a/documents/slides/design_review_template.pptx
+++ b/documents/slides/design_review_template.pptx
@@ -3485,7 +3485,7 @@
         <p:spPr>
           <a:xfrm>
             <a:off x="411480" y="109728"/>
-            <a:ext cx="11368735" cy="685800"/>
+            <a:ext cx="7711135" cy="685800"/>
           </a:xfrm>
           <a:prstGeom prst="rect">
             <a:avLst/>
@@ -3682,7 +3682,7 @@
                 </a:solidFill>
                 <a:latin typeface="Segoe UI"/>
               </a:rPr>
-              <a:t>•  Section dividers in this order: Overview, Use cases, Architecture, Class diagrams, Sequence diagrams, Deployment, System concepts, Open items</a:t>
+              <a:t>•  Section dividers in this order: Overview, Use cases, Use case descriptions, Architecture, Class diagrams, Sequence diagrams; system architecture, deployment and concepts are drawn once, for the system</a:t>
             </a:r>
           </a:p>
           <a:p>
@@ -3746,7 +3746,7 @@
                 </a:solidFill>
                 <a:latin typeface="Segoe UI"/>
               </a:rPr>
-              <a:t>•  No use case descriptions on slides (the professor asked us to leave them out)</a:t>
+              <a:t>•  Use case descriptions on their own slides, in one block after the use case diagram, so a presenter can skip past them</a:t>
             </a:r>
           </a:p>
         </p:txBody>
@@ -3821,7 +3821,7 @@
         <p:spPr>
           <a:xfrm>
             <a:off x="411480" y="109728"/>
-            <a:ext cx="11368735" cy="685800"/>
+            <a:ext cx="7711135" cy="685800"/>
           </a:xfrm>
           <a:prstGeom prst="rect">
             <a:avLst/>
@@ -4253,7 +4253,7 @@
         <p:spPr>
           <a:xfrm>
             <a:off x="411480" y="109728"/>
-            <a:ext cx="11368735" cy="685800"/>
+            <a:ext cx="7711135" cy="685800"/>
           </a:xfrm>
           <a:prstGeom prst="rect">
             <a:avLst/>
@@ -4613,7 +4613,7 @@
         <p:spPr>
           <a:xfrm>
             <a:off x="411480" y="109728"/>
-            <a:ext cx="11368735" cy="685800"/>
+            <a:ext cx="7711135" cy="685800"/>
           </a:xfrm>
           <a:prstGeom prst="rect">
             <a:avLst/>
